--- a/讲义/第1周/AI的发展与未来/AI的发展与未来-V3.pptx
+++ b/讲义/第1周/AI的发展与未来/AI的发展与未来-V3.pptx
@@ -3130,7 +3130,50 @@
         <p:txBody>
           <a:bodyPr/>
           <a:p>
-            <a:endParaRPr lang="zh-CN" altLang="en-US"/>
+            <a:r>
+              <a:rPr lang="zh-CN" altLang="en-US"/>
+              <a:t>从零到一，从一到</a:t>
+            </a:r>
+            <a:r>
+              <a:rPr lang="zh-CN" altLang="en-US"/>
+              <a:t>一百</a:t>
+            </a:r>
+            <a:endParaRPr lang="zh-CN" altLang="en-US"/>
+          </a:p>
+          <a:p>
+            <a:r>
+              <a:rPr lang="zh-CN" altLang="en-US"/>
+              <a:t>会用</a:t>
+            </a:r>
+            <a:r>
+              <a:rPr lang="en-US" altLang="zh-CN"/>
+              <a:t>AI -&gt; </a:t>
+            </a:r>
+            <a:r>
+              <a:rPr lang="zh-CN" altLang="en-US"/>
+              <a:t>理解</a:t>
+            </a:r>
+            <a:r>
+              <a:rPr lang="en-US" altLang="zh-CN"/>
+              <a:t>AI -&gt; </a:t>
+            </a:r>
+            <a:r>
+              <a:rPr lang="zh-CN" altLang="en-US"/>
+              <a:t>应用</a:t>
+            </a:r>
+            <a:r>
+              <a:rPr lang="en-US" altLang="zh-CN"/>
+              <a:t>AI -&gt; </a:t>
+            </a:r>
+            <a:r>
+              <a:rPr lang="zh-CN" altLang="en-US"/>
+              <a:t>前沿</a:t>
+            </a:r>
+            <a:r>
+              <a:rPr lang="en-US" altLang="zh-CN"/>
+              <a:t>AI</a:t>
+            </a:r>
+            <a:endParaRPr lang="en-US" altLang="zh-CN"/>
           </a:p>
         </p:txBody>
       </p:sp>
@@ -3172,6 +3215,18 @@
         <p:txBody>
           <a:bodyPr/>
           <a:p>
+            <a:r>
+              <a:rPr lang="zh-CN" altLang="en-US"/>
+              <a:t>对</a:t>
+            </a:r>
+            <a:r>
+              <a:rPr lang="en-US" altLang="zh-CN"/>
+              <a:t>AI</a:t>
+            </a:r>
+            <a:r>
+              <a:rPr lang="zh-CN" altLang="en-US"/>
+              <a:t>的疑问</a:t>
+            </a:r>
             <a:endParaRPr lang="zh-CN" altLang="en-US"/>
           </a:p>
         </p:txBody>
